--- a/0_Documentation/00 GCC_ImplementationDocuments_8_22_25/GCC_Timeline and Status_9_19_25.pptx
+++ b/0_Documentation/00 GCC_ImplementationDocuments_8_22_25/GCC_Timeline and Status_9_19_25.pptx
@@ -195,14 +195,6 @@
 <p188:authorLst xmlns:a="http://schemas.openxmlformats.org/drawingml/2006/main" xmlns:r="http://schemas.openxmlformats.org/officeDocument/2006/relationships" xmlns:p188="http://schemas.microsoft.com/office/powerpoint/2018/8/main">
   <p188:author id="{8892B05B-E117-52AD-3F68-AE601404E83B}" name="Shawn West" initials="SW" userId="S::Swest@anukiconsulting.com::bcaf3c6b-bfc1-40d2-81dc-c3fa941236d7" providerId="AD"/>
 </p188:authorLst>
-</file>
-
-<file path=ppt/revisionInfo.xml><?xml version="1.0" encoding="utf-8"?>
-<p1510:revInfo xmlns:a="http://schemas.openxmlformats.org/drawingml/2006/main" xmlns:r="http://schemas.openxmlformats.org/officeDocument/2006/relationships" xmlns:p1510="http://schemas.microsoft.com/office/powerpoint/2015/10/main">
-  <p1510:revLst>
-    <p1510:client id="{502E98C1-975B-4C67-B5ED-3E9D2CA9E44A}" v="38" dt="2025-08-29T13:24:35.195"/>
-  </p1510:revLst>
-</p1510:revInfo>
 </file>
 
 <file path=ppt/diagrams/colors1.xml><?xml version="1.0" encoding="utf-8"?>
@@ -6951,7 +6943,7 @@
           </a:lstStyle>
           <a:p>
             <a:fld id="{1904ED56-815F-4152-9F12-EA9FD3F07DC0}" type="datetimeFigureOut">
-              <a:t>9/19/2025</a:t>
+              <a:t>9/25/2025</a:t>
             </a:fld>
             <a:endParaRPr lang="en-US"/>
           </a:p>
@@ -10725,7 +10717,7 @@
           <a:p>
             <a:fld id="{FAAB834C-2F9F-4134-A8A6-8D28F07BEAB5}" type="datetime1">
               <a:rPr lang="en-US" smtClean="0"/>
-              <a:t>9/19/2025</a:t>
+              <a:t>9/25/2025</a:t>
             </a:fld>
             <a:endParaRPr lang="en-US"/>
           </a:p>
@@ -10874,7 +10866,7 @@
           <a:p>
             <a:fld id="{14EC8B48-3E80-40FE-82B7-08F610C8B0AF}" type="datetime1">
               <a:rPr lang="en-US" smtClean="0"/>
-              <a:t>9/19/2025</a:t>
+              <a:t>9/25/2025</a:t>
             </a:fld>
             <a:endParaRPr lang="en-US"/>
           </a:p>
@@ -11159,7 +11151,7 @@
           <a:p>
             <a:fld id="{F0056A89-B657-4E56-81EA-47AEC42B3D30}" type="datetime1">
               <a:rPr lang="en-US" smtClean="0"/>
-              <a:t>9/19/2025</a:t>
+              <a:t>9/25/2025</a:t>
             </a:fld>
             <a:endParaRPr lang="en-US"/>
           </a:p>
@@ -11441,7 +11433,7 @@
           <a:p>
             <a:fld id="{B5CFD0E2-6DB6-48B0-A00E-AF2C677C1319}" type="datetime1">
               <a:rPr lang="en-US" smtClean="0"/>
-              <a:t>9/19/2025</a:t>
+              <a:t>9/25/2025</a:t>
             </a:fld>
             <a:endParaRPr lang="en-US"/>
           </a:p>
@@ -11719,7 +11711,7 @@
           <a:p>
             <a:fld id="{B3C5E615-12C4-4709-B50C-4AFC9D577141}" type="datetime1">
               <a:rPr lang="en-US" smtClean="0"/>
-              <a:t>9/19/2025</a:t>
+              <a:t>9/25/2025</a:t>
             </a:fld>
             <a:endParaRPr lang="en-US"/>
           </a:p>
@@ -12148,7 +12140,7 @@
           <a:p>
             <a:fld id="{8F516FE9-DAFF-4019-B1DF-FCD5398715BB}" type="datetime1">
               <a:rPr lang="en-US" smtClean="0"/>
-              <a:t>9/19/2025</a:t>
+              <a:t>9/25/2025</a:t>
             </a:fld>
             <a:endParaRPr lang="en-US"/>
           </a:p>
@@ -12309,7 +12301,7 @@
           <a:p>
             <a:fld id="{AFDEACDC-4FA8-4934-9E2F-B8BAA099B586}" type="datetime1">
               <a:rPr lang="en-US" smtClean="0"/>
-              <a:t>9/19/2025</a:t>
+              <a:t>9/25/2025</a:t>
             </a:fld>
             <a:endParaRPr lang="en-US"/>
           </a:p>
@@ -12631,7 +12623,7 @@
           <a:p>
             <a:fld id="{618E9538-4AA9-4306-AAAC-5D9AE10FAA03}" type="datetime1">
               <a:rPr lang="en-US" smtClean="0"/>
-              <a:t>9/19/2025</a:t>
+              <a:t>9/25/2025</a:t>
             </a:fld>
             <a:endParaRPr lang="en-US"/>
           </a:p>
@@ -12919,7 +12911,7 @@
           <a:p>
             <a:fld id="{D822262E-171E-47EC-8BDD-63B9658BD71F}" type="datetime1">
               <a:rPr lang="en-US" smtClean="0"/>
-              <a:t>9/19/2025</a:t>
+              <a:t>9/25/2025</a:t>
             </a:fld>
             <a:endParaRPr lang="en-US"/>
           </a:p>
@@ -13114,7 +13106,7 @@
           <a:p>
             <a:fld id="{9D1DDE8F-1896-42B2-B75E-118659C1A926}" type="datetime1">
               <a:rPr lang="en-US" smtClean="0"/>
-              <a:t>9/19/2025</a:t>
+              <a:t>9/25/2025</a:t>
             </a:fld>
             <a:endParaRPr lang="en-US"/>
           </a:p>
@@ -13993,7 +13985,7 @@
           <a:p>
             <a:fld id="{0ECCE86E-37E5-4543-A6EB-A0C93BD06DFB}" type="datetime1">
               <a:rPr lang="en-US" smtClean="0"/>
-              <a:t>9/19/2025</a:t>
+              <a:t>9/25/2025</a:t>
             </a:fld>
             <a:endParaRPr lang="en-US"/>
           </a:p>
@@ -14237,7 +14229,7 @@
           <a:p>
             <a:fld id="{F0056A89-B657-4E56-81EA-47AEC42B3D30}" type="datetime1">
               <a:rPr lang="en-US" smtClean="0"/>
-              <a:t>9/19/2025</a:t>
+              <a:t>9/25/2025</a:t>
             </a:fld>
             <a:endParaRPr lang="en-US"/>
           </a:p>
@@ -14425,7 +14417,7 @@
           <a:p>
             <a:fld id="{F0056A89-B657-4E56-81EA-47AEC42B3D30}" type="datetime1">
               <a:rPr lang="en-US" smtClean="0"/>
-              <a:t>9/19/2025</a:t>
+              <a:t>9/25/2025</a:t>
             </a:fld>
             <a:endParaRPr lang="en-US"/>
           </a:p>
@@ -14612,7 +14604,7 @@
           <a:p>
             <a:fld id="{F0056A89-B657-4E56-81EA-47AEC42B3D30}" type="datetime1">
               <a:rPr lang="en-US" smtClean="0"/>
-              <a:t>9/19/2025</a:t>
+              <a:t>9/25/2025</a:t>
             </a:fld>
             <a:endParaRPr lang="en-US"/>
           </a:p>
@@ -14803,7 +14795,7 @@
           <a:p>
             <a:fld id="{F0056A89-B657-4E56-81EA-47AEC42B3D30}" type="datetime1">
               <a:rPr lang="en-US" smtClean="0"/>
-              <a:t>9/19/2025</a:t>
+              <a:t>9/25/2025</a:t>
             </a:fld>
             <a:endParaRPr lang="en-US"/>
           </a:p>
@@ -15107,7 +15099,7 @@
           <a:p>
             <a:fld id="{F0056A89-B657-4E56-81EA-47AEC42B3D30}" type="datetime1">
               <a:rPr lang="en-US" smtClean="0"/>
-              <a:t>9/19/2025</a:t>
+              <a:t>9/25/2025</a:t>
             </a:fld>
             <a:endParaRPr lang="en-US"/>
           </a:p>
@@ -15276,7 +15268,7 @@
           <a:p>
             <a:fld id="{F0056A89-B657-4E56-81EA-47AEC42B3D30}" type="datetime1">
               <a:rPr lang="en-US" smtClean="0"/>
-              <a:t>9/19/2025</a:t>
+              <a:t>9/25/2025</a:t>
             </a:fld>
             <a:endParaRPr lang="en-US"/>
           </a:p>
@@ -16985,7 +16977,7 @@
                   <a:spcPts val="600"/>
                 </a:spcAft>
               </a:pPr>
-              <a:t>9/19/2025</a:t>
+              <a:t>9/25/2025</a:t>
             </a:fld>
             <a:endParaRPr lang="en-US"/>
           </a:p>
@@ -17352,7 +17344,7 @@
           <a:p>
             <a:fld id="{F0056A89-B657-4E56-81EA-47AEC42B3D30}" type="datetime1">
               <a:rPr lang="en-US" smtClean="0"/>
-              <a:t>9/19/2025</a:t>
+              <a:t>9/25/2025</a:t>
             </a:fld>
             <a:endParaRPr lang="en-US" dirty="0"/>
           </a:p>
@@ -17621,7 +17613,7 @@
           <a:p>
             <a:fld id="{F0056A89-B657-4E56-81EA-47AEC42B3D30}" type="datetime1">
               <a:rPr lang="en-US" smtClean="0"/>
-              <a:t>9/19/2025</a:t>
+              <a:t>9/25/2025</a:t>
             </a:fld>
             <a:endParaRPr lang="en-US"/>
           </a:p>
@@ -17840,7 +17832,7 @@
           <a:p>
             <a:fld id="{F0056A89-B657-4E56-81EA-47AEC42B3D30}" type="datetime1">
               <a:rPr lang="en-US" smtClean="0"/>
-              <a:t>9/19/2025</a:t>
+              <a:t>9/25/2025</a:t>
             </a:fld>
             <a:endParaRPr lang="en-US"/>
           </a:p>
@@ -18014,7 +18006,7 @@
                   <a:spcPts val="600"/>
                 </a:spcAft>
               </a:pPr>
-              <a:t>9/19/2025</a:t>
+              <a:t>9/25/2025</a:t>
             </a:fld>
             <a:endParaRPr lang="en-US" dirty="0"/>
           </a:p>
@@ -19335,7 +19327,7 @@
                     <a:p>
                       <a:pPr algn="l" rtl="0" fontAlgn="t"/>
                       <a:r>
-                        <a:rPr lang="en-US" sz="1100" b="0" i="0" u="none" strike="noStrike" kern="1200">
+                        <a:rPr lang="en-US" sz="1100" b="0" i="0" u="none" strike="noStrike" kern="1200" dirty="0">
                           <a:solidFill>
                             <a:srgbClr val="000000"/>
                           </a:solidFill>
@@ -30318,7 +30310,7 @@
         </p:nvSpPr>
         <p:spPr>
           <a:xfrm>
-            <a:off x="8987198" y="4148489"/>
+            <a:off x="9555905" y="4148489"/>
             <a:ext cx="1978134" cy="164592"/>
           </a:xfrm>
           <a:prstGeom prst="roundRect">
@@ -30385,7 +30377,7 @@
         </p:nvSpPr>
         <p:spPr>
           <a:xfrm>
-            <a:off x="10846323" y="4086498"/>
+            <a:off x="11348126" y="4097649"/>
             <a:ext cx="259879" cy="274299"/>
           </a:xfrm>
           <a:prstGeom prst="flowChartDecision">
@@ -31351,7 +31343,7 @@
           <a:p>
             <a:fld id="{F0056A89-B657-4E56-81EA-47AEC42B3D30}" type="datetime1">
               <a:rPr lang="en-US" smtClean="0"/>
-              <a:t>9/19/2025</a:t>
+              <a:t>9/25/2025</a:t>
             </a:fld>
             <a:endParaRPr lang="en-US"/>
           </a:p>
@@ -31583,7 +31575,7 @@
           <a:p>
             <a:fld id="{F0056A89-B657-4E56-81EA-47AEC42B3D30}" type="datetime1">
               <a:rPr lang="en-US" smtClean="0"/>
-              <a:t>9/19/2025</a:t>
+              <a:t>9/25/2025</a:t>
             </a:fld>
             <a:endParaRPr lang="en-US"/>
           </a:p>
@@ -31755,7 +31747,7 @@
           <a:p>
             <a:fld id="{B3C5E615-12C4-4709-B50C-4AFC9D577141}" type="datetime1">
               <a:rPr lang="en-US" smtClean="0"/>
-              <a:t>9/19/2025</a:t>
+              <a:t>9/25/2025</a:t>
             </a:fld>
             <a:endParaRPr lang="en-US"/>
           </a:p>
@@ -32041,7 +32033,7 @@
           <a:p>
             <a:fld id="{F0056A89-B657-4E56-81EA-47AEC42B3D30}" type="datetime1">
               <a:rPr lang="en-US" smtClean="0"/>
-              <a:t>9/19/2025</a:t>
+              <a:t>9/25/2025</a:t>
             </a:fld>
             <a:endParaRPr lang="en-US"/>
           </a:p>
@@ -32204,7 +32196,7 @@
           <a:p>
             <a:fld id="{F0056A89-B657-4E56-81EA-47AEC42B3D30}" type="datetime1">
               <a:rPr lang="en-US" smtClean="0"/>
-              <a:t>9/19/2025</a:t>
+              <a:t>9/25/2025</a:t>
             </a:fld>
             <a:endParaRPr lang="en-US"/>
           </a:p>
@@ -32367,7 +32359,7 @@
           <a:p>
             <a:fld id="{F0056A89-B657-4E56-81EA-47AEC42B3D30}" type="datetime1">
               <a:rPr lang="en-US" smtClean="0"/>
-              <a:t>9/19/2025</a:t>
+              <a:t>9/25/2025</a:t>
             </a:fld>
             <a:endParaRPr lang="en-US"/>
           </a:p>
@@ -32530,7 +32522,7 @@
           <a:p>
             <a:fld id="{F0056A89-B657-4E56-81EA-47AEC42B3D30}" type="datetime1">
               <a:rPr lang="en-US" smtClean="0"/>
-              <a:t>9/19/2025</a:t>
+              <a:t>9/25/2025</a:t>
             </a:fld>
             <a:endParaRPr lang="en-US"/>
           </a:p>
@@ -32693,7 +32685,7 @@
           <a:p>
             <a:fld id="{F0056A89-B657-4E56-81EA-47AEC42B3D30}" type="datetime1">
               <a:rPr lang="en-US" smtClean="0"/>
-              <a:t>9/19/2025</a:t>
+              <a:t>9/25/2025</a:t>
             </a:fld>
             <a:endParaRPr lang="en-US"/>
           </a:p>
@@ -32856,7 +32848,7 @@
           <a:p>
             <a:fld id="{F0056A89-B657-4E56-81EA-47AEC42B3D30}" type="datetime1">
               <a:rPr lang="en-US" smtClean="0"/>
-              <a:t>9/19/2025</a:t>
+              <a:t>9/25/2025</a:t>
             </a:fld>
             <a:endParaRPr lang="en-US"/>
           </a:p>
@@ -33019,7 +33011,7 @@
           <a:p>
             <a:fld id="{F0056A89-B657-4E56-81EA-47AEC42B3D30}" type="datetime1">
               <a:rPr lang="en-US" smtClean="0"/>
-              <a:t>9/19/2025</a:t>
+              <a:t>9/25/2025</a:t>
             </a:fld>
             <a:endParaRPr lang="en-US"/>
           </a:p>
@@ -33185,7 +33177,7 @@
           <a:p>
             <a:fld id="{F0056A89-B657-4E56-81EA-47AEC42B3D30}" type="datetime1">
               <a:rPr lang="en-US" smtClean="0"/>
-              <a:t>9/19/2025</a:t>
+              <a:t>9/25/2025</a:t>
             </a:fld>
             <a:endParaRPr lang="en-US"/>
           </a:p>
@@ -33378,7 +33370,7 @@
           <a:p>
             <a:fld id="{F0056A89-B657-4E56-81EA-47AEC42B3D30}" type="datetime1">
               <a:rPr lang="en-US" smtClean="0"/>
-              <a:t>9/19/2025</a:t>
+              <a:t>9/25/2025</a:t>
             </a:fld>
             <a:endParaRPr lang="en-US"/>
           </a:p>
@@ -33541,7 +33533,7 @@
           <a:p>
             <a:fld id="{F0056A89-B657-4E56-81EA-47AEC42B3D30}" type="datetime1">
               <a:rPr lang="en-US" smtClean="0"/>
-              <a:t>9/19/2025</a:t>
+              <a:t>9/25/2025</a:t>
             </a:fld>
             <a:endParaRPr lang="en-US"/>
           </a:p>
@@ -33716,7 +33708,7 @@
                   <a:spcPts val="600"/>
                 </a:spcAft>
               </a:pPr>
-              <a:t>9/19/2025</a:t>
+              <a:t>9/25/2025</a:t>
             </a:fld>
             <a:endParaRPr lang="en-US"/>
           </a:p>
@@ -33908,7 +33900,7 @@
           <a:p>
             <a:fld id="{F0056A89-B657-4E56-81EA-47AEC42B3D30}" type="datetime1">
               <a:rPr lang="en-US" smtClean="0"/>
-              <a:t>9/19/2025</a:t>
+              <a:t>9/25/2025</a:t>
             </a:fld>
             <a:endParaRPr lang="en-US"/>
           </a:p>
@@ -34080,7 +34072,7 @@
           <a:p>
             <a:fld id="{F0056A89-B657-4E56-81EA-47AEC42B3D30}" type="datetime1">
               <a:rPr lang="en-US" smtClean="0"/>
-              <a:t>9/19/2025</a:t>
+              <a:t>9/25/2025</a:t>
             </a:fld>
             <a:endParaRPr lang="en-US"/>
           </a:p>
@@ -34366,7 +34358,7 @@
           <a:p>
             <a:fld id="{F0056A89-B657-4E56-81EA-47AEC42B3D30}" type="datetime1">
               <a:rPr lang="en-US" smtClean="0"/>
-              <a:t>9/19/2025</a:t>
+              <a:t>9/25/2025</a:t>
             </a:fld>
             <a:endParaRPr lang="en-US"/>
           </a:p>
@@ -34532,7 +34524,7 @@
           <a:p>
             <a:fld id="{F0056A89-B657-4E56-81EA-47AEC42B3D30}" type="datetime1">
               <a:rPr lang="en-US" smtClean="0"/>
-              <a:t>9/19/2025</a:t>
+              <a:t>9/25/2025</a:t>
             </a:fld>
             <a:endParaRPr lang="en-US"/>
           </a:p>
@@ -34713,7 +34705,7 @@
           <a:p>
             <a:fld id="{F0056A89-B657-4E56-81EA-47AEC42B3D30}" type="datetime1">
               <a:rPr lang="en-US" smtClean="0"/>
-              <a:t>9/19/2025</a:t>
+              <a:t>9/25/2025</a:t>
             </a:fld>
             <a:endParaRPr lang="en-US"/>
           </a:p>
